--- a/storey-infratech-handbill.pptx
+++ b/storey-infratech-handbill.pptx
@@ -875,813 +875,9 @@
           <a:chExt cx="0" cy="0"/>
         </a:xfrm>
       </p:grpSpPr>
-      <p:sp>
-        <p:nvSpPr>
-          <p:cNvPr id="2" name="Text 0"/>
-          <p:cNvSpPr/>
-          <p:nvPr/>
-        </p:nvSpPr>
-        <p:spPr>
-          <a:xfrm>
-            <a:off x="0" y="228600"/>
-            <a:ext cx="5330952" cy="640080"/>
-          </a:xfrm>
-          <a:prstGeom prst="rect">
-            <a:avLst/>
-          </a:prstGeom>
-          <a:noFill/>
-          <a:ln/>
-        </p:spPr>
-        <p:txBody>
-          <a:bodyPr wrap="square" rtlCol="0" anchor="ctr"/>
-          <a:lstStyle/>
-          <a:p>
-            <a:pPr algn="ctr" indent="0" marL="0">
-              <a:buNone/>
-            </a:pPr>
-            <a:r>
-              <a:rPr lang="en-US" sz="5000" spc="600" kern="0" dirty="0">
-                <a:solidFill>
-                  <a:srgbClr val="FFFFFF"/>
-                </a:solidFill>
-                <a:latin typeface="Impact" pitchFamily="34" charset="0"/>
-                <a:ea typeface="Impact" pitchFamily="34" charset="-122"/>
-                <a:cs typeface="Impact" pitchFamily="34" charset="-120"/>
-              </a:rPr>
-              <a:t>STOREY</a:t>
-            </a:r>
-            <a:endParaRPr lang="en-US" sz="5000" dirty="0"/>
-          </a:p>
-        </p:txBody>
-      </p:sp>
-      <p:sp>
-        <p:nvSpPr>
-          <p:cNvPr id="3" name="Text 1"/>
-          <p:cNvSpPr/>
-          <p:nvPr/>
-        </p:nvSpPr>
-        <p:spPr>
-          <a:xfrm>
-            <a:off x="0" y="841248"/>
-            <a:ext cx="5330952" cy="274320"/>
-          </a:xfrm>
-          <a:prstGeom prst="rect">
-            <a:avLst/>
-          </a:prstGeom>
-          <a:noFill/>
-          <a:ln/>
-        </p:spPr>
-        <p:txBody>
-          <a:bodyPr wrap="square" rtlCol="0" anchor="ctr"/>
-          <a:lstStyle/>
-          <a:p>
-            <a:pPr algn="ctr" indent="0" marL="0">
-              <a:buNone/>
-            </a:pPr>
-            <a:r>
-              <a:rPr lang="en-US" sz="1200" spc="300" kern="0" dirty="0">
-                <a:solidFill>
-                  <a:srgbClr val="E7E8D1"/>
-                </a:solidFill>
-                <a:latin typeface="Calibri" pitchFamily="34" charset="0"/>
-                <a:ea typeface="Calibri" pitchFamily="34" charset="-122"/>
-                <a:cs typeface="Calibri" pitchFamily="34" charset="-120"/>
-              </a:rPr>
-              <a:t>SITE OPERATIONS · BUILT IN GUWAHATI</a:t>
-            </a:r>
-            <a:endParaRPr lang="en-US" sz="1200" dirty="0"/>
-          </a:p>
-        </p:txBody>
-      </p:sp>
-      <p:sp>
-        <p:nvSpPr>
-          <p:cNvPr id="4" name="Text 2"/>
-          <p:cNvSpPr/>
-          <p:nvPr/>
-        </p:nvSpPr>
-        <p:spPr>
-          <a:xfrm>
-            <a:off x="0" y="1188720"/>
-            <a:ext cx="5330952" cy="1188720"/>
-          </a:xfrm>
-          <a:prstGeom prst="rect">
-            <a:avLst/>
-          </a:prstGeom>
-          <a:noFill/>
-          <a:ln/>
-        </p:spPr>
-        <p:txBody>
-          <a:bodyPr wrap="square" rtlCol="0" anchor="ctr"/>
-          <a:lstStyle/>
-          <a:p>
-            <a:pPr algn="ctr" indent="0" marL="0">
-              <a:buNone/>
-            </a:pPr>
-            <a:r>
-              <a:rPr lang="en-US" sz="3400" b="1" dirty="0">
-                <a:solidFill>
-                  <a:srgbClr val="FFFFFF"/>
-                </a:solidFill>
-                <a:latin typeface="Georgia" pitchFamily="34" charset="0"/>
-                <a:ea typeface="Georgia" pitchFamily="34" charset="-122"/>
-                <a:cs typeface="Georgia" pitchFamily="34" charset="-120"/>
-              </a:rPr>
-              <a:t>Run your sites.</a:t>
-            </a:r>
-            <a:endParaRPr lang="en-US" sz="3400" dirty="0"/>
-          </a:p>
-          <a:p>
-            <a:pPr algn="ctr" indent="0" marL="0">
-              <a:buNone/>
-            </a:pPr>
-            <a:r>
-              <a:rPr lang="en-US" sz="3400" b="1" dirty="0">
-                <a:solidFill>
-                  <a:srgbClr val="FFFFFF"/>
-                </a:solidFill>
-                <a:latin typeface="Georgia" pitchFamily="34" charset="0"/>
-                <a:ea typeface="Georgia" pitchFamily="34" charset="-122"/>
-                <a:cs typeface="Georgia" pitchFamily="34" charset="-120"/>
-              </a:rPr>
-              <a:t>Not your phone.</a:t>
-            </a:r>
-            <a:endParaRPr lang="en-US" sz="3400" dirty="0"/>
-          </a:p>
-        </p:txBody>
-      </p:sp>
-      <p:sp>
-        <p:nvSpPr>
-          <p:cNvPr id="5" name="Text 3"/>
-          <p:cNvSpPr/>
-          <p:nvPr/>
-        </p:nvSpPr>
-        <p:spPr>
-          <a:xfrm>
-            <a:off x="274320" y="2331720"/>
-            <a:ext cx="4782312" cy="365760"/>
-          </a:xfrm>
-          <a:prstGeom prst="rect">
-            <a:avLst/>
-          </a:prstGeom>
-          <a:noFill/>
-          <a:ln/>
-        </p:spPr>
-        <p:txBody>
-          <a:bodyPr wrap="square" rtlCol="0" anchor="ctr"/>
-          <a:lstStyle/>
-          <a:p>
-            <a:pPr algn="ctr" indent="0" marL="0">
-              <a:buNone/>
-            </a:pPr>
-            <a:r>
-              <a:rPr lang="en-US" sz="1300" dirty="0">
-                <a:solidFill>
-                  <a:srgbClr val="E7E8D1"/>
-                </a:solidFill>
-                <a:latin typeface="Calibri" pitchFamily="34" charset="0"/>
-                <a:ea typeface="Calibri" pitchFamily="34" charset="-122"/>
-                <a:cs typeface="Calibri" pitchFamily="34" charset="-120"/>
-              </a:rPr>
-              <a:t>Attendance · Materials · Daily logs · Reports — one app.</a:t>
-            </a:r>
-            <a:endParaRPr lang="en-US" sz="1300" dirty="0"/>
-          </a:p>
-        </p:txBody>
-      </p:sp>
-      <p:sp>
-        <p:nvSpPr>
-          <p:cNvPr id="6" name="Shape 4"/>
-          <p:cNvSpPr/>
-          <p:nvPr/>
-        </p:nvSpPr>
-        <p:spPr>
-          <a:xfrm>
-            <a:off x="914400" y="2788920"/>
-            <a:ext cx="3502152" cy="566928"/>
-          </a:xfrm>
-          <a:prstGeom prst="roundRect">
-            <a:avLst>
-              <a:gd name="adj" fmla="val 48387"/>
-            </a:avLst>
-          </a:prstGeom>
-          <a:solidFill>
-            <a:srgbClr val="FFFFFF"/>
-          </a:solidFill>
-          <a:ln/>
-        </p:spPr>
-      </p:sp>
-      <p:sp>
-        <p:nvSpPr>
-          <p:cNvPr id="7" name="Text 5"/>
-          <p:cNvSpPr/>
-          <p:nvPr/>
-        </p:nvSpPr>
-        <p:spPr>
-          <a:xfrm>
-            <a:off x="914400" y="2834640"/>
-            <a:ext cx="3502152" cy="292608"/>
-          </a:xfrm>
-          <a:prstGeom prst="rect">
-            <a:avLst/>
-          </a:prstGeom>
-          <a:noFill/>
-          <a:ln/>
-        </p:spPr>
-        <p:txBody>
-          <a:bodyPr wrap="square" rtlCol="0" anchor="ctr"/>
-          <a:lstStyle/>
-          <a:p>
-            <a:pPr algn="ctr" indent="0" marL="0">
-              <a:buNone/>
-            </a:pPr>
-            <a:r>
-              <a:rPr lang="en-US" sz="1700" b="1" dirty="0">
-                <a:solidFill>
-                  <a:srgbClr val="B85042"/>
-                </a:solidFill>
-                <a:latin typeface="Georgia" pitchFamily="34" charset="0"/>
-                <a:ea typeface="Georgia" pitchFamily="34" charset="-122"/>
-                <a:cs typeface="Georgia" pitchFamily="34" charset="-120"/>
-              </a:rPr>
-              <a:t>FREE during launch beta</a:t>
-            </a:r>
-            <a:endParaRPr lang="en-US" sz="1700" dirty="0"/>
-          </a:p>
-        </p:txBody>
-      </p:sp>
-      <p:sp>
-        <p:nvSpPr>
-          <p:cNvPr id="8" name="Text 6"/>
-          <p:cNvSpPr/>
-          <p:nvPr/>
-        </p:nvSpPr>
-        <p:spPr>
-          <a:xfrm>
-            <a:off x="914400" y="3127248"/>
-            <a:ext cx="3502152" cy="201168"/>
-          </a:xfrm>
-          <a:prstGeom prst="rect">
-            <a:avLst/>
-          </a:prstGeom>
-          <a:noFill/>
-          <a:ln/>
-        </p:spPr>
-        <p:txBody>
-          <a:bodyPr wrap="square" rtlCol="0" anchor="ctr"/>
-          <a:lstStyle/>
-          <a:p>
-            <a:pPr algn="ctr" indent="0" marL="0">
-              <a:buNone/>
-            </a:pPr>
-            <a:r>
-              <a:rPr lang="en-US" sz="1000" dirty="0">
-                <a:solidFill>
-                  <a:srgbClr val="2A1410"/>
-                </a:solidFill>
-                <a:latin typeface="Calibri" pitchFamily="34" charset="0"/>
-                <a:ea typeface="Calibri" pitchFamily="34" charset="-122"/>
-                <a:cs typeface="Calibri" pitchFamily="34" charset="-120"/>
-              </a:rPr>
-              <a:t>No card. Start today. Your data stays yours.</a:t>
-            </a:r>
-            <a:endParaRPr lang="en-US" sz="1000" dirty="0"/>
-          </a:p>
-        </p:txBody>
-      </p:sp>
-      <p:sp>
-        <p:nvSpPr>
-          <p:cNvPr id="9" name="Shape 7"/>
-          <p:cNvSpPr/>
-          <p:nvPr/>
-        </p:nvSpPr>
-        <p:spPr>
-          <a:xfrm>
-            <a:off x="274320" y="3520440"/>
-            <a:ext cx="4782312" cy="2148840"/>
-          </a:xfrm>
-          <a:prstGeom prst="roundRect">
-            <a:avLst>
-              <a:gd name="adj" fmla="val 5106"/>
-            </a:avLst>
-          </a:prstGeom>
-          <a:solidFill>
-            <a:srgbClr val="E7E8D1"/>
-          </a:solidFill>
-          <a:ln/>
-        </p:spPr>
-      </p:sp>
-      <p:sp>
-        <p:nvSpPr>
-          <p:cNvPr id="10" name="Text 8"/>
-          <p:cNvSpPr/>
-          <p:nvPr/>
-        </p:nvSpPr>
-        <p:spPr>
-          <a:xfrm>
-            <a:off x="457200" y="3611880"/>
-            <a:ext cx="4389120" cy="365760"/>
-          </a:xfrm>
-          <a:prstGeom prst="rect">
-            <a:avLst/>
-          </a:prstGeom>
-          <a:noFill/>
-          <a:ln/>
-        </p:spPr>
-        <p:txBody>
-          <a:bodyPr wrap="square" rtlCol="0" anchor="ctr"/>
-          <a:lstStyle/>
-          <a:p>
-            <a:pPr indent="0" marL="0">
-              <a:buNone/>
-            </a:pPr>
-            <a:r>
-              <a:rPr lang="en-US" sz="1700" b="1" dirty="0">
-                <a:solidFill>
-                  <a:srgbClr val="2A1410"/>
-                </a:solidFill>
-                <a:latin typeface="Georgia" pitchFamily="34" charset="0"/>
-                <a:ea typeface="Georgia" pitchFamily="34" charset="-122"/>
-                <a:cs typeface="Georgia" pitchFamily="34" charset="-120"/>
-              </a:rPr>
-              <a:t>Why contractors pick Storey</a:t>
-            </a:r>
-            <a:endParaRPr lang="en-US" sz="1700" dirty="0"/>
-          </a:p>
-        </p:txBody>
-      </p:sp>
-      <p:sp>
-        <p:nvSpPr>
-          <p:cNvPr id="11" name="Shape 9"/>
-          <p:cNvSpPr/>
-          <p:nvPr/>
-        </p:nvSpPr>
-        <p:spPr>
-          <a:xfrm>
-            <a:off x="457200" y="4023360"/>
-            <a:ext cx="274320" cy="274320"/>
-          </a:xfrm>
-          <a:prstGeom prst="ellipse">
-            <a:avLst/>
-          </a:prstGeom>
-          <a:solidFill>
-            <a:srgbClr val="A7BEAE"/>
-          </a:solidFill>
-          <a:ln/>
-        </p:spPr>
-      </p:sp>
-      <p:sp>
-        <p:nvSpPr>
-          <p:cNvPr id="12" name="Text 10"/>
-          <p:cNvSpPr/>
-          <p:nvPr/>
-        </p:nvSpPr>
-        <p:spPr>
-          <a:xfrm>
-            <a:off x="457200" y="4023360"/>
-            <a:ext cx="274320" cy="274320"/>
-          </a:xfrm>
-          <a:prstGeom prst="rect">
-            <a:avLst/>
-          </a:prstGeom>
-          <a:noFill/>
-          <a:ln/>
-        </p:spPr>
-        <p:txBody>
-          <a:bodyPr wrap="square" rtlCol="0" anchor="ctr"/>
-          <a:lstStyle/>
-          <a:p>
-            <a:pPr algn="ctr" indent="0" marL="0">
-              <a:buNone/>
-            </a:pPr>
-            <a:r>
-              <a:rPr lang="en-US" sz="1300" b="1" dirty="0">
-                <a:solidFill>
-                  <a:srgbClr val="2A1410"/>
-                </a:solidFill>
-                <a:latin typeface="Georgia" pitchFamily="34" charset="0"/>
-                <a:ea typeface="Georgia" pitchFamily="34" charset="-122"/>
-                <a:cs typeface="Georgia" pitchFamily="34" charset="-120"/>
-              </a:rPr>
-              <a:t>1</a:t>
-            </a:r>
-            <a:endParaRPr lang="en-US" sz="1300" dirty="0"/>
-          </a:p>
-        </p:txBody>
-      </p:sp>
-      <p:sp>
-        <p:nvSpPr>
-          <p:cNvPr id="13" name="Text 11"/>
-          <p:cNvSpPr/>
-          <p:nvPr/>
-        </p:nvSpPr>
-        <p:spPr>
-          <a:xfrm>
-            <a:off x="841248" y="3986784"/>
-            <a:ext cx="4023360" cy="365760"/>
-          </a:xfrm>
-          <a:prstGeom prst="rect">
-            <a:avLst/>
-          </a:prstGeom>
-          <a:noFill/>
-          <a:ln/>
-        </p:spPr>
-        <p:txBody>
-          <a:bodyPr wrap="square" rtlCol="0" anchor="ctr"/>
-          <a:lstStyle/>
-          <a:p>
-            <a:pPr indent="0" marL="0">
-              <a:buNone/>
-            </a:pPr>
-            <a:r>
-              <a:rPr lang="en-US" sz="1200" b="1" dirty="0">
-                <a:solidFill>
-                  <a:srgbClr val="2A1410"/>
-                </a:solidFill>
-                <a:latin typeface="Calibri" pitchFamily="34" charset="0"/>
-                <a:ea typeface="Calibri" pitchFamily="34" charset="-122"/>
-                <a:cs typeface="Calibri" pitchFamily="34" charset="-120"/>
-              </a:rPr>
-              <a:t>Pay per SITE — not per user   </a:t>
-            </a:r>
-            <a:pPr indent="0" marL="0">
-              <a:buNone/>
-            </a:pPr>
-            <a:r>
-              <a:rPr lang="en-US" sz="1000" dirty="0">
-                <a:solidFill>
-                  <a:srgbClr val="4A3530"/>
-                </a:solidFill>
-                <a:latin typeface="Calibri" pitchFamily="34" charset="0"/>
-                <a:ea typeface="Calibri" pitchFamily="34" charset="-122"/>
-                <a:cs typeface="Calibri" pitchFamily="34" charset="-120"/>
-              </a:rPr>
-              <a:t>Your whole team works on it. No per-head charges.</a:t>
-            </a:r>
-            <a:endParaRPr lang="en-US" sz="1200" dirty="0"/>
-          </a:p>
-        </p:txBody>
-      </p:sp>
-      <p:sp>
-        <p:nvSpPr>
-          <p:cNvPr id="14" name="Shape 12"/>
-          <p:cNvSpPr/>
-          <p:nvPr/>
-        </p:nvSpPr>
-        <p:spPr>
-          <a:xfrm>
-            <a:off x="457200" y="4425696"/>
-            <a:ext cx="274320" cy="274320"/>
-          </a:xfrm>
-          <a:prstGeom prst="ellipse">
-            <a:avLst/>
-          </a:prstGeom>
-          <a:solidFill>
-            <a:srgbClr val="A7BEAE"/>
-          </a:solidFill>
-          <a:ln/>
-        </p:spPr>
-      </p:sp>
-      <p:sp>
-        <p:nvSpPr>
-          <p:cNvPr id="15" name="Text 13"/>
-          <p:cNvSpPr/>
-          <p:nvPr/>
-        </p:nvSpPr>
-        <p:spPr>
-          <a:xfrm>
-            <a:off x="457200" y="4425696"/>
-            <a:ext cx="274320" cy="274320"/>
-          </a:xfrm>
-          <a:prstGeom prst="rect">
-            <a:avLst/>
-          </a:prstGeom>
-          <a:noFill/>
-          <a:ln/>
-        </p:spPr>
-        <p:txBody>
-          <a:bodyPr wrap="square" rtlCol="0" anchor="ctr"/>
-          <a:lstStyle/>
-          <a:p>
-            <a:pPr algn="ctr" indent="0" marL="0">
-              <a:buNone/>
-            </a:pPr>
-            <a:r>
-              <a:rPr lang="en-US" sz="1300" b="1" dirty="0">
-                <a:solidFill>
-                  <a:srgbClr val="2A1410"/>
-                </a:solidFill>
-                <a:latin typeface="Georgia" pitchFamily="34" charset="0"/>
-                <a:ea typeface="Georgia" pitchFamily="34" charset="-122"/>
-                <a:cs typeface="Georgia" pitchFamily="34" charset="-120"/>
-              </a:rPr>
-              <a:t>2</a:t>
-            </a:r>
-            <a:endParaRPr lang="en-US" sz="1300" dirty="0"/>
-          </a:p>
-        </p:txBody>
-      </p:sp>
-      <p:sp>
-        <p:nvSpPr>
-          <p:cNvPr id="16" name="Text 14"/>
-          <p:cNvSpPr/>
-          <p:nvPr/>
-        </p:nvSpPr>
-        <p:spPr>
-          <a:xfrm>
-            <a:off x="841248" y="4389120"/>
-            <a:ext cx="4023360" cy="365760"/>
-          </a:xfrm>
-          <a:prstGeom prst="rect">
-            <a:avLst/>
-          </a:prstGeom>
-          <a:noFill/>
-          <a:ln/>
-        </p:spPr>
-        <p:txBody>
-          <a:bodyPr wrap="square" rtlCol="0" anchor="ctr"/>
-          <a:lstStyle/>
-          <a:p>
-            <a:pPr indent="0" marL="0">
-              <a:buNone/>
-            </a:pPr>
-            <a:r>
-              <a:rPr lang="en-US" sz="1200" b="1" dirty="0">
-                <a:solidFill>
-                  <a:srgbClr val="2A1410"/>
-                </a:solidFill>
-                <a:latin typeface="Calibri" pitchFamily="34" charset="0"/>
-                <a:ea typeface="Calibri" pitchFamily="34" charset="-122"/>
-                <a:cs typeface="Calibri" pitchFamily="34" charset="-120"/>
-              </a:rPr>
-              <a:t>Made for NE-India sites   </a:t>
-            </a:r>
-            <a:pPr indent="0" marL="0">
-              <a:buNone/>
-            </a:pPr>
-            <a:r>
-              <a:rPr lang="en-US" sz="1000" dirty="0">
-                <a:solidFill>
-                  <a:srgbClr val="4A3530"/>
-                </a:solidFill>
-                <a:latin typeface="Calibri" pitchFamily="34" charset="0"/>
-                <a:ea typeface="Calibri" pitchFamily="34" charset="-122"/>
-                <a:cs typeface="Calibri" pitchFamily="34" charset="-120"/>
-              </a:rPr>
-              <a:t>Works on an old phone, patchy 4G, offline too.</a:t>
-            </a:r>
-            <a:endParaRPr lang="en-US" sz="1200" dirty="0"/>
-          </a:p>
-        </p:txBody>
-      </p:sp>
-      <p:sp>
-        <p:nvSpPr>
-          <p:cNvPr id="17" name="Shape 15"/>
-          <p:cNvSpPr/>
-          <p:nvPr/>
-        </p:nvSpPr>
-        <p:spPr>
-          <a:xfrm>
-            <a:off x="457200" y="4828032"/>
-            <a:ext cx="274320" cy="274320"/>
-          </a:xfrm>
-          <a:prstGeom prst="ellipse">
-            <a:avLst/>
-          </a:prstGeom>
-          <a:solidFill>
-            <a:srgbClr val="A7BEAE"/>
-          </a:solidFill>
-          <a:ln/>
-        </p:spPr>
-      </p:sp>
-      <p:sp>
-        <p:nvSpPr>
-          <p:cNvPr id="18" name="Text 16"/>
-          <p:cNvSpPr/>
-          <p:nvPr/>
-        </p:nvSpPr>
-        <p:spPr>
-          <a:xfrm>
-            <a:off x="457200" y="4828032"/>
-            <a:ext cx="274320" cy="274320"/>
-          </a:xfrm>
-          <a:prstGeom prst="rect">
-            <a:avLst/>
-          </a:prstGeom>
-          <a:noFill/>
-          <a:ln/>
-        </p:spPr>
-        <p:txBody>
-          <a:bodyPr wrap="square" rtlCol="0" anchor="ctr"/>
-          <a:lstStyle/>
-          <a:p>
-            <a:pPr algn="ctr" indent="0" marL="0">
-              <a:buNone/>
-            </a:pPr>
-            <a:r>
-              <a:rPr lang="en-US" sz="1300" b="1" dirty="0">
-                <a:solidFill>
-                  <a:srgbClr val="2A1410"/>
-                </a:solidFill>
-                <a:latin typeface="Georgia" pitchFamily="34" charset="0"/>
-                <a:ea typeface="Georgia" pitchFamily="34" charset="-122"/>
-                <a:cs typeface="Georgia" pitchFamily="34" charset="-120"/>
-              </a:rPr>
-              <a:t>3</a:t>
-            </a:r>
-            <a:endParaRPr lang="en-US" sz="1300" dirty="0"/>
-          </a:p>
-        </p:txBody>
-      </p:sp>
-      <p:sp>
-        <p:nvSpPr>
-          <p:cNvPr id="19" name="Text 17"/>
-          <p:cNvSpPr/>
-          <p:nvPr/>
-        </p:nvSpPr>
-        <p:spPr>
-          <a:xfrm>
-            <a:off x="841248" y="4791456"/>
-            <a:ext cx="4023360" cy="365760"/>
-          </a:xfrm>
-          <a:prstGeom prst="rect">
-            <a:avLst/>
-          </a:prstGeom>
-          <a:noFill/>
-          <a:ln/>
-        </p:spPr>
-        <p:txBody>
-          <a:bodyPr wrap="square" rtlCol="0" anchor="ctr"/>
-          <a:lstStyle/>
-          <a:p>
-            <a:pPr indent="0" marL="0">
-              <a:buNone/>
-            </a:pPr>
-            <a:r>
-              <a:rPr lang="en-US" sz="1200" b="1" dirty="0">
-                <a:solidFill>
-                  <a:srgbClr val="2A1410"/>
-                </a:solidFill>
-                <a:latin typeface="Calibri" pitchFamily="34" charset="0"/>
-                <a:ea typeface="Calibri" pitchFamily="34" charset="-122"/>
-                <a:cs typeface="Calibri" pitchFamily="34" charset="-120"/>
-              </a:rPr>
-              <a:t>See where the cement went   </a:t>
-            </a:r>
-            <a:pPr indent="0" marL="0">
-              <a:buNone/>
-            </a:pPr>
-            <a:r>
-              <a:rPr lang="en-US" sz="1000" dirty="0">
-                <a:solidFill>
-                  <a:srgbClr val="4A3530"/>
-                </a:solidFill>
-                <a:latin typeface="Calibri" pitchFamily="34" charset="0"/>
-                <a:ea typeface="Calibri" pitchFamily="34" charset="-122"/>
-                <a:cs typeface="Calibri" pitchFamily="34" charset="-120"/>
-              </a:rPr>
-              <a:t>Material in, issued, transferred — every bag tracked.</a:t>
-            </a:r>
-            <a:endParaRPr lang="en-US" sz="1200" dirty="0"/>
-          </a:p>
-        </p:txBody>
-      </p:sp>
-      <p:sp>
-        <p:nvSpPr>
-          <p:cNvPr id="20" name="Shape 18"/>
-          <p:cNvSpPr/>
-          <p:nvPr/>
-        </p:nvSpPr>
-        <p:spPr>
-          <a:xfrm>
-            <a:off x="457200" y="5230368"/>
-            <a:ext cx="274320" cy="274320"/>
-          </a:xfrm>
-          <a:prstGeom prst="ellipse">
-            <a:avLst/>
-          </a:prstGeom>
-          <a:solidFill>
-            <a:srgbClr val="A7BEAE"/>
-          </a:solidFill>
-          <a:ln/>
-        </p:spPr>
-      </p:sp>
-      <p:sp>
-        <p:nvSpPr>
-          <p:cNvPr id="21" name="Text 19"/>
-          <p:cNvSpPr/>
-          <p:nvPr/>
-        </p:nvSpPr>
-        <p:spPr>
-          <a:xfrm>
-            <a:off x="457200" y="5230368"/>
-            <a:ext cx="274320" cy="274320"/>
-          </a:xfrm>
-          <a:prstGeom prst="rect">
-            <a:avLst/>
-          </a:prstGeom>
-          <a:noFill/>
-          <a:ln/>
-        </p:spPr>
-        <p:txBody>
-          <a:bodyPr wrap="square" rtlCol="0" anchor="ctr"/>
-          <a:lstStyle/>
-          <a:p>
-            <a:pPr algn="ctr" indent="0" marL="0">
-              <a:buNone/>
-            </a:pPr>
-            <a:r>
-              <a:rPr lang="en-US" sz="1300" b="1" dirty="0">
-                <a:solidFill>
-                  <a:srgbClr val="2A1410"/>
-                </a:solidFill>
-                <a:latin typeface="Georgia" pitchFamily="34" charset="0"/>
-                <a:ea typeface="Georgia" pitchFamily="34" charset="-122"/>
-                <a:cs typeface="Georgia" pitchFamily="34" charset="-120"/>
-              </a:rPr>
-              <a:t>4</a:t>
-            </a:r>
-            <a:endParaRPr lang="en-US" sz="1300" dirty="0"/>
-          </a:p>
-        </p:txBody>
-      </p:sp>
-      <p:sp>
-        <p:nvSpPr>
-          <p:cNvPr id="22" name="Text 20"/>
-          <p:cNvSpPr/>
-          <p:nvPr/>
-        </p:nvSpPr>
-        <p:spPr>
-          <a:xfrm>
-            <a:off x="841248" y="5193792"/>
-            <a:ext cx="4023360" cy="365760"/>
-          </a:xfrm>
-          <a:prstGeom prst="rect">
-            <a:avLst/>
-          </a:prstGeom>
-          <a:noFill/>
-          <a:ln/>
-        </p:spPr>
-        <p:txBody>
-          <a:bodyPr wrap="square" rtlCol="0" anchor="ctr"/>
-          <a:lstStyle/>
-          <a:p>
-            <a:pPr indent="0" marL="0">
-              <a:buNone/>
-            </a:pPr>
-            <a:r>
-              <a:rPr lang="en-US" sz="1200" b="1" dirty="0">
-                <a:solidFill>
-                  <a:srgbClr val="2A1410"/>
-                </a:solidFill>
-                <a:latin typeface="Calibri" pitchFamily="34" charset="0"/>
-                <a:ea typeface="Calibri" pitchFamily="34" charset="-122"/>
-                <a:cs typeface="Calibri" pitchFamily="34" charset="-120"/>
-              </a:rPr>
-              <a:t>Reports on WhatsApp   </a:t>
-            </a:r>
-            <a:pPr indent="0" marL="0">
-              <a:buNone/>
-            </a:pPr>
-            <a:r>
-              <a:rPr lang="en-US" sz="1000" dirty="0">
-                <a:solidFill>
-                  <a:srgbClr val="4A3530"/>
-                </a:solidFill>
-                <a:latin typeface="Calibri" pitchFamily="34" charset="0"/>
-                <a:ea typeface="Calibri" pitchFamily="34" charset="-122"/>
-                <a:cs typeface="Calibri" pitchFamily="34" charset="-120"/>
-              </a:rPr>
-              <a:t>Daily attendance + spend, one tap to your phone.</a:t>
-            </a:r>
-            <a:endParaRPr lang="en-US" sz="1200" dirty="0"/>
-          </a:p>
-        </p:txBody>
-      </p:sp>
-      <p:sp>
-        <p:nvSpPr>
-          <p:cNvPr id="23" name="Shape 21"/>
-          <p:cNvSpPr/>
-          <p:nvPr/>
-        </p:nvSpPr>
-        <p:spPr>
-          <a:xfrm>
-            <a:off x="274320" y="5806440"/>
-            <a:ext cx="4782312" cy="960120"/>
-          </a:xfrm>
-          <a:prstGeom prst="roundRect">
-            <a:avLst>
-              <a:gd name="adj" fmla="val 11429"/>
-            </a:avLst>
-          </a:prstGeom>
-          <a:solidFill>
-            <a:srgbClr val="FFFFFF"/>
-          </a:solidFill>
-          <a:ln/>
-        </p:spPr>
-      </p:sp>
       <p:pic>
         <p:nvPicPr>
-          <p:cNvPr id="24" name="Image 0" descr="preencoded.png">    </p:cNvPr>
+          <p:cNvPr id="2" name="Image 0" descr="preencoded.png">    </p:cNvPr>
           <p:cNvPicPr>
             <a:picLocks noChangeAspect="1"/>
           </p:cNvPicPr>
@@ -1695,8 +891,8 @@
         </p:blipFill>
         <p:spPr>
           <a:xfrm>
-            <a:off x="411480" y="5943600"/>
-            <a:ext cx="685800" cy="685800"/>
+            <a:off x="320040" y="256032"/>
+            <a:ext cx="566928" cy="566928"/>
           </a:xfrm>
           <a:prstGeom prst="rect">
             <a:avLst/>
@@ -1705,14 +901,14 @@
       </p:pic>
       <p:sp>
         <p:nvSpPr>
-          <p:cNvPr id="25" name="Text 22"/>
-          <p:cNvSpPr/>
-          <p:nvPr/>
-        </p:nvSpPr>
-        <p:spPr>
-          <a:xfrm>
-            <a:off x="1234440" y="5989320"/>
-            <a:ext cx="3657600" cy="274320"/>
+          <p:cNvPr id="3" name="Text 0"/>
+          <p:cNvSpPr/>
+          <p:nvPr/>
+        </p:nvSpPr>
+        <p:spPr>
+          <a:xfrm>
+            <a:off x="457200" y="228600"/>
+            <a:ext cx="5330952" cy="640080"/>
           </a:xfrm>
           <a:prstGeom prst="rect">
             <a:avLst/>
@@ -1724,34 +920,129 @@
           <a:bodyPr wrap="square" rtlCol="0" anchor="ctr"/>
           <a:lstStyle/>
           <a:p>
-            <a:pPr indent="0" marL="0">
-              <a:buNone/>
-            </a:pPr>
-            <a:r>
-              <a:rPr lang="en-US" sz="1500" b="1" dirty="0">
-                <a:solidFill>
-                  <a:srgbClr val="2A1410"/>
+            <a:pPr algn="ctr" indent="0" marL="0">
+              <a:buNone/>
+            </a:pPr>
+            <a:r>
+              <a:rPr lang="en-US" sz="5000" spc="600" kern="0" dirty="0">
+                <a:solidFill>
+                  <a:srgbClr val="FFFFFF"/>
+                </a:solidFill>
+                <a:latin typeface="Impact" pitchFamily="34" charset="0"/>
+                <a:ea typeface="Impact" pitchFamily="34" charset="-122"/>
+                <a:cs typeface="Impact" pitchFamily="34" charset="-120"/>
+              </a:rPr>
+              <a:t>STOREY</a:t>
+            </a:r>
+            <a:endParaRPr lang="en-US" sz="5000" dirty="0"/>
+          </a:p>
+        </p:txBody>
+      </p:sp>
+      <p:sp>
+        <p:nvSpPr>
+          <p:cNvPr id="4" name="Text 1"/>
+          <p:cNvSpPr/>
+          <p:nvPr/>
+        </p:nvSpPr>
+        <p:spPr>
+          <a:xfrm>
+            <a:off x="0" y="841248"/>
+            <a:ext cx="5330952" cy="274320"/>
+          </a:xfrm>
+          <a:prstGeom prst="rect">
+            <a:avLst/>
+          </a:prstGeom>
+          <a:noFill/>
+          <a:ln/>
+        </p:spPr>
+        <p:txBody>
+          <a:bodyPr wrap="square" rtlCol="0" anchor="ctr"/>
+          <a:lstStyle/>
+          <a:p>
+            <a:pPr algn="ctr" indent="0" marL="0">
+              <a:buNone/>
+            </a:pPr>
+            <a:r>
+              <a:rPr lang="en-US" sz="1200" spc="300" kern="0" dirty="0">
+                <a:solidFill>
+                  <a:srgbClr val="E7E8D1"/>
+                </a:solidFill>
+                <a:latin typeface="Calibri" pitchFamily="34" charset="0"/>
+                <a:ea typeface="Calibri" pitchFamily="34" charset="-122"/>
+                <a:cs typeface="Calibri" pitchFamily="34" charset="-120"/>
+              </a:rPr>
+              <a:t>SITE OPERATIONS · BUILT IN GUWAHATI</a:t>
+            </a:r>
+            <a:endParaRPr lang="en-US" sz="1200" dirty="0"/>
+          </a:p>
+        </p:txBody>
+      </p:sp>
+      <p:sp>
+        <p:nvSpPr>
+          <p:cNvPr id="5" name="Text 2"/>
+          <p:cNvSpPr/>
+          <p:nvPr/>
+        </p:nvSpPr>
+        <p:spPr>
+          <a:xfrm>
+            <a:off x="0" y="1188720"/>
+            <a:ext cx="5330952" cy="1188720"/>
+          </a:xfrm>
+          <a:prstGeom prst="rect">
+            <a:avLst/>
+          </a:prstGeom>
+          <a:noFill/>
+          <a:ln/>
+        </p:spPr>
+        <p:txBody>
+          <a:bodyPr wrap="square" rtlCol="0" anchor="ctr"/>
+          <a:lstStyle/>
+          <a:p>
+            <a:pPr algn="ctr" indent="0" marL="0">
+              <a:buNone/>
+            </a:pPr>
+            <a:r>
+              <a:rPr lang="en-US" sz="3400" b="1" dirty="0">
+                <a:solidFill>
+                  <a:srgbClr val="FFFFFF"/>
                 </a:solidFill>
                 <a:latin typeface="Georgia" pitchFamily="34" charset="0"/>
                 <a:ea typeface="Georgia" pitchFamily="34" charset="-122"/>
                 <a:cs typeface="Georgia" pitchFamily="34" charset="-120"/>
               </a:rPr>
-              <a:t>Get the app — scan with your phone</a:t>
-            </a:r>
-            <a:endParaRPr lang="en-US" sz="1500" dirty="0"/>
-          </a:p>
-        </p:txBody>
-      </p:sp>
-      <p:sp>
-        <p:nvSpPr>
-          <p:cNvPr id="26" name="Text 23"/>
-          <p:cNvSpPr/>
-          <p:nvPr/>
-        </p:nvSpPr>
-        <p:spPr>
-          <a:xfrm>
-            <a:off x="1234440" y="6309360"/>
-            <a:ext cx="3657600" cy="274320"/>
+              <a:t>Run your sites.</a:t>
+            </a:r>
+            <a:endParaRPr lang="en-US" sz="3400" dirty="0"/>
+          </a:p>
+          <a:p>
+            <a:pPr algn="ctr" indent="0" marL="0">
+              <a:buNone/>
+            </a:pPr>
+            <a:r>
+              <a:rPr lang="en-US" sz="3400" b="1" dirty="0">
+                <a:solidFill>
+                  <a:srgbClr val="FFFFFF"/>
+                </a:solidFill>
+                <a:latin typeface="Georgia" pitchFamily="34" charset="0"/>
+                <a:ea typeface="Georgia" pitchFamily="34" charset="-122"/>
+                <a:cs typeface="Georgia" pitchFamily="34" charset="-120"/>
+              </a:rPr>
+              <a:t>Not your phone.</a:t>
+            </a:r>
+            <a:endParaRPr lang="en-US" sz="3400" dirty="0"/>
+          </a:p>
+        </p:txBody>
+      </p:sp>
+      <p:sp>
+        <p:nvSpPr>
+          <p:cNvPr id="6" name="Text 3"/>
+          <p:cNvSpPr/>
+          <p:nvPr/>
+        </p:nvSpPr>
+        <p:spPr>
+          <a:xfrm>
+            <a:off x="274320" y="2331720"/>
+            <a:ext cx="4782312" cy="365760"/>
           </a:xfrm>
           <a:prstGeom prst="rect">
             <a:avLst/>
@@ -1763,54 +1054,56 @@
           <a:bodyPr wrap="square" rtlCol="0" anchor="ctr"/>
           <a:lstStyle/>
           <a:p>
-            <a:pPr indent="0" marL="0">
-              <a:buNone/>
-            </a:pPr>
-            <a:r>
-              <a:rPr lang="en-US" sz="1200" dirty="0">
-                <a:solidFill>
-                  <a:srgbClr val="4A3530"/>
+            <a:pPr algn="ctr" indent="0" marL="0">
+              <a:buNone/>
+            </a:pPr>
+            <a:r>
+              <a:rPr lang="en-US" sz="1300" dirty="0">
+                <a:solidFill>
+                  <a:srgbClr val="E7E8D1"/>
                 </a:solidFill>
                 <a:latin typeface="Calibri" pitchFamily="34" charset="0"/>
                 <a:ea typeface="Calibri" pitchFamily="34" charset="-122"/>
                 <a:cs typeface="Calibri" pitchFamily="34" charset="-120"/>
               </a:rPr>
-              <a:t>Google Play · Android   ·   storeyinfra.com</a:t>
-            </a:r>
-            <a:endParaRPr lang="en-US" sz="1200" dirty="0"/>
-          </a:p>
-        </p:txBody>
-      </p:sp>
-      <p:sp>
-        <p:nvSpPr>
-          <p:cNvPr id="27" name="Shape 24"/>
-          <p:cNvSpPr/>
-          <p:nvPr/>
-        </p:nvSpPr>
-        <p:spPr>
-          <a:xfrm>
-            <a:off x="0" y="6858000"/>
-            <a:ext cx="5330952" cy="704088"/>
-          </a:xfrm>
-          <a:prstGeom prst="rect">
-            <a:avLst/>
-          </a:prstGeom>
-          <a:solidFill>
-            <a:srgbClr val="9A3F33"/>
-          </a:solidFill>
-          <a:ln/>
-        </p:spPr>
-      </p:sp>
-      <p:sp>
-        <p:nvSpPr>
-          <p:cNvPr id="28" name="Text 25"/>
-          <p:cNvSpPr/>
-          <p:nvPr/>
-        </p:nvSpPr>
-        <p:spPr>
-          <a:xfrm>
-            <a:off x="274320" y="6903720"/>
-            <a:ext cx="4782312" cy="274320"/>
+              <a:t>Attendance · Materials · Daily logs · Reports — one app.</a:t>
+            </a:r>
+            <a:endParaRPr lang="en-US" sz="1300" dirty="0"/>
+          </a:p>
+        </p:txBody>
+      </p:sp>
+      <p:sp>
+        <p:nvSpPr>
+          <p:cNvPr id="7" name="Shape 4"/>
+          <p:cNvSpPr/>
+          <p:nvPr/>
+        </p:nvSpPr>
+        <p:spPr>
+          <a:xfrm>
+            <a:off x="914400" y="2788920"/>
+            <a:ext cx="3502152" cy="566928"/>
+          </a:xfrm>
+          <a:prstGeom prst="roundRect">
+            <a:avLst>
+              <a:gd name="adj" fmla="val 48387"/>
+            </a:avLst>
+          </a:prstGeom>
+          <a:solidFill>
+            <a:srgbClr val="FFFFFF"/>
+          </a:solidFill>
+          <a:ln/>
+        </p:spPr>
+      </p:sp>
+      <p:sp>
+        <p:nvSpPr>
+          <p:cNvPr id="8" name="Text 5"/>
+          <p:cNvSpPr/>
+          <p:nvPr/>
+        </p:nvSpPr>
+        <p:spPr>
+          <a:xfrm>
+            <a:off x="914400" y="2834640"/>
+            <a:ext cx="3502152" cy="292608"/>
           </a:xfrm>
           <a:prstGeom prst="rect">
             <a:avLst/>
@@ -1822,18 +1115,749 @@
           <a:bodyPr wrap="square" rtlCol="0" anchor="ctr"/>
           <a:lstStyle/>
           <a:p>
-            <a:pPr indent="0" marL="0">
-              <a:buNone/>
-            </a:pPr>
-            <a:r>
-              <a:rPr lang="en-US" sz="1300" b="1" dirty="0">
-                <a:solidFill>
-                  <a:srgbClr val="FFFFFF"/>
+            <a:pPr algn="ctr" indent="0" marL="0">
+              <a:buNone/>
+            </a:pPr>
+            <a:r>
+              <a:rPr lang="en-US" sz="1700" b="1" dirty="0">
+                <a:solidFill>
+                  <a:srgbClr val="B85042"/>
+                </a:solidFill>
+                <a:latin typeface="Georgia" pitchFamily="34" charset="0"/>
+                <a:ea typeface="Georgia" pitchFamily="34" charset="-122"/>
+                <a:cs typeface="Georgia" pitchFamily="34" charset="-120"/>
+              </a:rPr>
+              <a:t>FREE during launch beta</a:t>
+            </a:r>
+            <a:endParaRPr lang="en-US" sz="1700" dirty="0"/>
+          </a:p>
+        </p:txBody>
+      </p:sp>
+      <p:sp>
+        <p:nvSpPr>
+          <p:cNvPr id="9" name="Text 6"/>
+          <p:cNvSpPr/>
+          <p:nvPr/>
+        </p:nvSpPr>
+        <p:spPr>
+          <a:xfrm>
+            <a:off x="914400" y="3127248"/>
+            <a:ext cx="3502152" cy="201168"/>
+          </a:xfrm>
+          <a:prstGeom prst="rect">
+            <a:avLst/>
+          </a:prstGeom>
+          <a:noFill/>
+          <a:ln/>
+        </p:spPr>
+        <p:txBody>
+          <a:bodyPr wrap="square" rtlCol="0" anchor="ctr"/>
+          <a:lstStyle/>
+          <a:p>
+            <a:pPr algn="ctr" indent="0" marL="0">
+              <a:buNone/>
+            </a:pPr>
+            <a:r>
+              <a:rPr lang="en-US" sz="1000" dirty="0">
+                <a:solidFill>
+                  <a:srgbClr val="2A1410"/>
                 </a:solidFill>
                 <a:latin typeface="Calibri" pitchFamily="34" charset="0"/>
                 <a:ea typeface="Calibri" pitchFamily="34" charset="-122"/>
                 <a:cs typeface="Calibri" pitchFamily="34" charset="-120"/>
               </a:rPr>
+              <a:t>No card. Start today. Your data stays yours.</a:t>
+            </a:r>
+            <a:endParaRPr lang="en-US" sz="1000" dirty="0"/>
+          </a:p>
+        </p:txBody>
+      </p:sp>
+      <p:sp>
+        <p:nvSpPr>
+          <p:cNvPr id="10" name="Shape 7"/>
+          <p:cNvSpPr/>
+          <p:nvPr/>
+        </p:nvSpPr>
+        <p:spPr>
+          <a:xfrm>
+            <a:off x="274320" y="3520440"/>
+            <a:ext cx="4782312" cy="2148840"/>
+          </a:xfrm>
+          <a:prstGeom prst="roundRect">
+            <a:avLst>
+              <a:gd name="adj" fmla="val 5106"/>
+            </a:avLst>
+          </a:prstGeom>
+          <a:solidFill>
+            <a:srgbClr val="E7E8D1"/>
+          </a:solidFill>
+          <a:ln/>
+        </p:spPr>
+      </p:sp>
+      <p:sp>
+        <p:nvSpPr>
+          <p:cNvPr id="11" name="Text 8"/>
+          <p:cNvSpPr/>
+          <p:nvPr/>
+        </p:nvSpPr>
+        <p:spPr>
+          <a:xfrm>
+            <a:off x="457200" y="3611880"/>
+            <a:ext cx="4389120" cy="365760"/>
+          </a:xfrm>
+          <a:prstGeom prst="rect">
+            <a:avLst/>
+          </a:prstGeom>
+          <a:noFill/>
+          <a:ln/>
+        </p:spPr>
+        <p:txBody>
+          <a:bodyPr wrap="square" rtlCol="0" anchor="ctr"/>
+          <a:lstStyle/>
+          <a:p>
+            <a:pPr indent="0" marL="0">
+              <a:buNone/>
+            </a:pPr>
+            <a:r>
+              <a:rPr lang="en-US" sz="1700" b="1" dirty="0">
+                <a:solidFill>
+                  <a:srgbClr val="2A1410"/>
+                </a:solidFill>
+                <a:latin typeface="Georgia" pitchFamily="34" charset="0"/>
+                <a:ea typeface="Georgia" pitchFamily="34" charset="-122"/>
+                <a:cs typeface="Georgia" pitchFamily="34" charset="-120"/>
+              </a:rPr>
+              <a:t>Why contractors pick Storey</a:t>
+            </a:r>
+            <a:endParaRPr lang="en-US" sz="1700" dirty="0"/>
+          </a:p>
+        </p:txBody>
+      </p:sp>
+      <p:sp>
+        <p:nvSpPr>
+          <p:cNvPr id="12" name="Shape 9"/>
+          <p:cNvSpPr/>
+          <p:nvPr/>
+        </p:nvSpPr>
+        <p:spPr>
+          <a:xfrm>
+            <a:off x="457200" y="4023360"/>
+            <a:ext cx="274320" cy="274320"/>
+          </a:xfrm>
+          <a:prstGeom prst="ellipse">
+            <a:avLst/>
+          </a:prstGeom>
+          <a:solidFill>
+            <a:srgbClr val="A7BEAE"/>
+          </a:solidFill>
+          <a:ln/>
+        </p:spPr>
+      </p:sp>
+      <p:sp>
+        <p:nvSpPr>
+          <p:cNvPr id="13" name="Text 10"/>
+          <p:cNvSpPr/>
+          <p:nvPr/>
+        </p:nvSpPr>
+        <p:spPr>
+          <a:xfrm>
+            <a:off x="457200" y="4023360"/>
+            <a:ext cx="274320" cy="274320"/>
+          </a:xfrm>
+          <a:prstGeom prst="rect">
+            <a:avLst/>
+          </a:prstGeom>
+          <a:noFill/>
+          <a:ln/>
+        </p:spPr>
+        <p:txBody>
+          <a:bodyPr wrap="square" rtlCol="0" anchor="ctr"/>
+          <a:lstStyle/>
+          <a:p>
+            <a:pPr algn="ctr" indent="0" marL="0">
+              <a:buNone/>
+            </a:pPr>
+            <a:r>
+              <a:rPr lang="en-US" sz="1300" b="1" dirty="0">
+                <a:solidFill>
+                  <a:srgbClr val="2A1410"/>
+                </a:solidFill>
+                <a:latin typeface="Georgia" pitchFamily="34" charset="0"/>
+                <a:ea typeface="Georgia" pitchFamily="34" charset="-122"/>
+                <a:cs typeface="Georgia" pitchFamily="34" charset="-120"/>
+              </a:rPr>
+              <a:t>1</a:t>
+            </a:r>
+            <a:endParaRPr lang="en-US" sz="1300" dirty="0"/>
+          </a:p>
+        </p:txBody>
+      </p:sp>
+      <p:sp>
+        <p:nvSpPr>
+          <p:cNvPr id="14" name="Text 11"/>
+          <p:cNvSpPr/>
+          <p:nvPr/>
+        </p:nvSpPr>
+        <p:spPr>
+          <a:xfrm>
+            <a:off x="841248" y="3986784"/>
+            <a:ext cx="4023360" cy="365760"/>
+          </a:xfrm>
+          <a:prstGeom prst="rect">
+            <a:avLst/>
+          </a:prstGeom>
+          <a:noFill/>
+          <a:ln/>
+        </p:spPr>
+        <p:txBody>
+          <a:bodyPr wrap="square" rtlCol="0" anchor="ctr"/>
+          <a:lstStyle/>
+          <a:p>
+            <a:pPr indent="0" marL="0">
+              <a:buNone/>
+            </a:pPr>
+            <a:r>
+              <a:rPr lang="en-US" sz="1200" b="1" dirty="0">
+                <a:solidFill>
+                  <a:srgbClr val="2A1410"/>
+                </a:solidFill>
+                <a:latin typeface="Calibri" pitchFamily="34" charset="0"/>
+                <a:ea typeface="Calibri" pitchFamily="34" charset="-122"/>
+                <a:cs typeface="Calibri" pitchFamily="34" charset="-120"/>
+              </a:rPr>
+              <a:t>Pay per SITE — not per user   </a:t>
+            </a:r>
+            <a:pPr indent="0" marL="0">
+              <a:buNone/>
+            </a:pPr>
+            <a:r>
+              <a:rPr lang="en-US" sz="1000" dirty="0">
+                <a:solidFill>
+                  <a:srgbClr val="4A3530"/>
+                </a:solidFill>
+                <a:latin typeface="Calibri" pitchFamily="34" charset="0"/>
+                <a:ea typeface="Calibri" pitchFamily="34" charset="-122"/>
+                <a:cs typeface="Calibri" pitchFamily="34" charset="-120"/>
+              </a:rPr>
+              <a:t>Your whole team works on it. No per-head charges.</a:t>
+            </a:r>
+            <a:endParaRPr lang="en-US" sz="1200" dirty="0"/>
+          </a:p>
+        </p:txBody>
+      </p:sp>
+      <p:sp>
+        <p:nvSpPr>
+          <p:cNvPr id="15" name="Shape 12"/>
+          <p:cNvSpPr/>
+          <p:nvPr/>
+        </p:nvSpPr>
+        <p:spPr>
+          <a:xfrm>
+            <a:off x="457200" y="4425696"/>
+            <a:ext cx="274320" cy="274320"/>
+          </a:xfrm>
+          <a:prstGeom prst="ellipse">
+            <a:avLst/>
+          </a:prstGeom>
+          <a:solidFill>
+            <a:srgbClr val="A7BEAE"/>
+          </a:solidFill>
+          <a:ln/>
+        </p:spPr>
+      </p:sp>
+      <p:sp>
+        <p:nvSpPr>
+          <p:cNvPr id="16" name="Text 13"/>
+          <p:cNvSpPr/>
+          <p:nvPr/>
+        </p:nvSpPr>
+        <p:spPr>
+          <a:xfrm>
+            <a:off x="457200" y="4425696"/>
+            <a:ext cx="274320" cy="274320"/>
+          </a:xfrm>
+          <a:prstGeom prst="rect">
+            <a:avLst/>
+          </a:prstGeom>
+          <a:noFill/>
+          <a:ln/>
+        </p:spPr>
+        <p:txBody>
+          <a:bodyPr wrap="square" rtlCol="0" anchor="ctr"/>
+          <a:lstStyle/>
+          <a:p>
+            <a:pPr algn="ctr" indent="0" marL="0">
+              <a:buNone/>
+            </a:pPr>
+            <a:r>
+              <a:rPr lang="en-US" sz="1300" b="1" dirty="0">
+                <a:solidFill>
+                  <a:srgbClr val="2A1410"/>
+                </a:solidFill>
+                <a:latin typeface="Georgia" pitchFamily="34" charset="0"/>
+                <a:ea typeface="Georgia" pitchFamily="34" charset="-122"/>
+                <a:cs typeface="Georgia" pitchFamily="34" charset="-120"/>
+              </a:rPr>
+              <a:t>2</a:t>
+            </a:r>
+            <a:endParaRPr lang="en-US" sz="1300" dirty="0"/>
+          </a:p>
+        </p:txBody>
+      </p:sp>
+      <p:sp>
+        <p:nvSpPr>
+          <p:cNvPr id="17" name="Text 14"/>
+          <p:cNvSpPr/>
+          <p:nvPr/>
+        </p:nvSpPr>
+        <p:spPr>
+          <a:xfrm>
+            <a:off x="841248" y="4389120"/>
+            <a:ext cx="4023360" cy="365760"/>
+          </a:xfrm>
+          <a:prstGeom prst="rect">
+            <a:avLst/>
+          </a:prstGeom>
+          <a:noFill/>
+          <a:ln/>
+        </p:spPr>
+        <p:txBody>
+          <a:bodyPr wrap="square" rtlCol="0" anchor="ctr"/>
+          <a:lstStyle/>
+          <a:p>
+            <a:pPr indent="0" marL="0">
+              <a:buNone/>
+            </a:pPr>
+            <a:r>
+              <a:rPr lang="en-US" sz="1200" b="1" dirty="0">
+                <a:solidFill>
+                  <a:srgbClr val="2A1410"/>
+                </a:solidFill>
+                <a:latin typeface="Calibri" pitchFamily="34" charset="0"/>
+                <a:ea typeface="Calibri" pitchFamily="34" charset="-122"/>
+                <a:cs typeface="Calibri" pitchFamily="34" charset="-120"/>
+              </a:rPr>
+              <a:t>Made for NE-India sites   </a:t>
+            </a:r>
+            <a:pPr indent="0" marL="0">
+              <a:buNone/>
+            </a:pPr>
+            <a:r>
+              <a:rPr lang="en-US" sz="1000" dirty="0">
+                <a:solidFill>
+                  <a:srgbClr val="4A3530"/>
+                </a:solidFill>
+                <a:latin typeface="Calibri" pitchFamily="34" charset="0"/>
+                <a:ea typeface="Calibri" pitchFamily="34" charset="-122"/>
+                <a:cs typeface="Calibri" pitchFamily="34" charset="-120"/>
+              </a:rPr>
+              <a:t>Works on an old phone, patchy 4G, offline too.</a:t>
+            </a:r>
+            <a:endParaRPr lang="en-US" sz="1200" dirty="0"/>
+          </a:p>
+        </p:txBody>
+      </p:sp>
+      <p:sp>
+        <p:nvSpPr>
+          <p:cNvPr id="18" name="Shape 15"/>
+          <p:cNvSpPr/>
+          <p:nvPr/>
+        </p:nvSpPr>
+        <p:spPr>
+          <a:xfrm>
+            <a:off x="457200" y="4828032"/>
+            <a:ext cx="274320" cy="274320"/>
+          </a:xfrm>
+          <a:prstGeom prst="ellipse">
+            <a:avLst/>
+          </a:prstGeom>
+          <a:solidFill>
+            <a:srgbClr val="A7BEAE"/>
+          </a:solidFill>
+          <a:ln/>
+        </p:spPr>
+      </p:sp>
+      <p:sp>
+        <p:nvSpPr>
+          <p:cNvPr id="19" name="Text 16"/>
+          <p:cNvSpPr/>
+          <p:nvPr/>
+        </p:nvSpPr>
+        <p:spPr>
+          <a:xfrm>
+            <a:off x="457200" y="4828032"/>
+            <a:ext cx="274320" cy="274320"/>
+          </a:xfrm>
+          <a:prstGeom prst="rect">
+            <a:avLst/>
+          </a:prstGeom>
+          <a:noFill/>
+          <a:ln/>
+        </p:spPr>
+        <p:txBody>
+          <a:bodyPr wrap="square" rtlCol="0" anchor="ctr"/>
+          <a:lstStyle/>
+          <a:p>
+            <a:pPr algn="ctr" indent="0" marL="0">
+              <a:buNone/>
+            </a:pPr>
+            <a:r>
+              <a:rPr lang="en-US" sz="1300" b="1" dirty="0">
+                <a:solidFill>
+                  <a:srgbClr val="2A1410"/>
+                </a:solidFill>
+                <a:latin typeface="Georgia" pitchFamily="34" charset="0"/>
+                <a:ea typeface="Georgia" pitchFamily="34" charset="-122"/>
+                <a:cs typeface="Georgia" pitchFamily="34" charset="-120"/>
+              </a:rPr>
+              <a:t>3</a:t>
+            </a:r>
+            <a:endParaRPr lang="en-US" sz="1300" dirty="0"/>
+          </a:p>
+        </p:txBody>
+      </p:sp>
+      <p:sp>
+        <p:nvSpPr>
+          <p:cNvPr id="20" name="Text 17"/>
+          <p:cNvSpPr/>
+          <p:nvPr/>
+        </p:nvSpPr>
+        <p:spPr>
+          <a:xfrm>
+            <a:off x="841248" y="4791456"/>
+            <a:ext cx="4023360" cy="365760"/>
+          </a:xfrm>
+          <a:prstGeom prst="rect">
+            <a:avLst/>
+          </a:prstGeom>
+          <a:noFill/>
+          <a:ln/>
+        </p:spPr>
+        <p:txBody>
+          <a:bodyPr wrap="square" rtlCol="0" anchor="ctr"/>
+          <a:lstStyle/>
+          <a:p>
+            <a:pPr indent="0" marL="0">
+              <a:buNone/>
+            </a:pPr>
+            <a:r>
+              <a:rPr lang="en-US" sz="1200" b="1" dirty="0">
+                <a:solidFill>
+                  <a:srgbClr val="2A1410"/>
+                </a:solidFill>
+                <a:latin typeface="Calibri" pitchFamily="34" charset="0"/>
+                <a:ea typeface="Calibri" pitchFamily="34" charset="-122"/>
+                <a:cs typeface="Calibri" pitchFamily="34" charset="-120"/>
+              </a:rPr>
+              <a:t>See where the cement went   </a:t>
+            </a:r>
+            <a:pPr indent="0" marL="0">
+              <a:buNone/>
+            </a:pPr>
+            <a:r>
+              <a:rPr lang="en-US" sz="1000" dirty="0">
+                <a:solidFill>
+                  <a:srgbClr val="4A3530"/>
+                </a:solidFill>
+                <a:latin typeface="Calibri" pitchFamily="34" charset="0"/>
+                <a:ea typeface="Calibri" pitchFamily="34" charset="-122"/>
+                <a:cs typeface="Calibri" pitchFamily="34" charset="-120"/>
+              </a:rPr>
+              <a:t>Material in, issued, transferred — every bag tracked.</a:t>
+            </a:r>
+            <a:endParaRPr lang="en-US" sz="1200" dirty="0"/>
+          </a:p>
+        </p:txBody>
+      </p:sp>
+      <p:sp>
+        <p:nvSpPr>
+          <p:cNvPr id="21" name="Shape 18"/>
+          <p:cNvSpPr/>
+          <p:nvPr/>
+        </p:nvSpPr>
+        <p:spPr>
+          <a:xfrm>
+            <a:off x="457200" y="5230368"/>
+            <a:ext cx="274320" cy="274320"/>
+          </a:xfrm>
+          <a:prstGeom prst="ellipse">
+            <a:avLst/>
+          </a:prstGeom>
+          <a:solidFill>
+            <a:srgbClr val="A7BEAE"/>
+          </a:solidFill>
+          <a:ln/>
+        </p:spPr>
+      </p:sp>
+      <p:sp>
+        <p:nvSpPr>
+          <p:cNvPr id="22" name="Text 19"/>
+          <p:cNvSpPr/>
+          <p:nvPr/>
+        </p:nvSpPr>
+        <p:spPr>
+          <a:xfrm>
+            <a:off x="457200" y="5230368"/>
+            <a:ext cx="274320" cy="274320"/>
+          </a:xfrm>
+          <a:prstGeom prst="rect">
+            <a:avLst/>
+          </a:prstGeom>
+          <a:noFill/>
+          <a:ln/>
+        </p:spPr>
+        <p:txBody>
+          <a:bodyPr wrap="square" rtlCol="0" anchor="ctr"/>
+          <a:lstStyle/>
+          <a:p>
+            <a:pPr algn="ctr" indent="0" marL="0">
+              <a:buNone/>
+            </a:pPr>
+            <a:r>
+              <a:rPr lang="en-US" sz="1300" b="1" dirty="0">
+                <a:solidFill>
+                  <a:srgbClr val="2A1410"/>
+                </a:solidFill>
+                <a:latin typeface="Georgia" pitchFamily="34" charset="0"/>
+                <a:ea typeface="Georgia" pitchFamily="34" charset="-122"/>
+                <a:cs typeface="Georgia" pitchFamily="34" charset="-120"/>
+              </a:rPr>
+              <a:t>4</a:t>
+            </a:r>
+            <a:endParaRPr lang="en-US" sz="1300" dirty="0"/>
+          </a:p>
+        </p:txBody>
+      </p:sp>
+      <p:sp>
+        <p:nvSpPr>
+          <p:cNvPr id="23" name="Text 20"/>
+          <p:cNvSpPr/>
+          <p:nvPr/>
+        </p:nvSpPr>
+        <p:spPr>
+          <a:xfrm>
+            <a:off x="841248" y="5193792"/>
+            <a:ext cx="4023360" cy="365760"/>
+          </a:xfrm>
+          <a:prstGeom prst="rect">
+            <a:avLst/>
+          </a:prstGeom>
+          <a:noFill/>
+          <a:ln/>
+        </p:spPr>
+        <p:txBody>
+          <a:bodyPr wrap="square" rtlCol="0" anchor="ctr"/>
+          <a:lstStyle/>
+          <a:p>
+            <a:pPr indent="0" marL="0">
+              <a:buNone/>
+            </a:pPr>
+            <a:r>
+              <a:rPr lang="en-US" sz="1200" b="1" dirty="0">
+                <a:solidFill>
+                  <a:srgbClr val="2A1410"/>
+                </a:solidFill>
+                <a:latin typeface="Calibri" pitchFamily="34" charset="0"/>
+                <a:ea typeface="Calibri" pitchFamily="34" charset="-122"/>
+                <a:cs typeface="Calibri" pitchFamily="34" charset="-120"/>
+              </a:rPr>
+              <a:t>Reports on WhatsApp   </a:t>
+            </a:r>
+            <a:pPr indent="0" marL="0">
+              <a:buNone/>
+            </a:pPr>
+            <a:r>
+              <a:rPr lang="en-US" sz="1000" dirty="0">
+                <a:solidFill>
+                  <a:srgbClr val="4A3530"/>
+                </a:solidFill>
+                <a:latin typeface="Calibri" pitchFamily="34" charset="0"/>
+                <a:ea typeface="Calibri" pitchFamily="34" charset="-122"/>
+                <a:cs typeface="Calibri" pitchFamily="34" charset="-120"/>
+              </a:rPr>
+              <a:t>Daily attendance + spend, one tap to your phone.</a:t>
+            </a:r>
+            <a:endParaRPr lang="en-US" sz="1200" dirty="0"/>
+          </a:p>
+        </p:txBody>
+      </p:sp>
+      <p:sp>
+        <p:nvSpPr>
+          <p:cNvPr id="24" name="Shape 21"/>
+          <p:cNvSpPr/>
+          <p:nvPr/>
+        </p:nvSpPr>
+        <p:spPr>
+          <a:xfrm>
+            <a:off x="274320" y="5806440"/>
+            <a:ext cx="4782312" cy="960120"/>
+          </a:xfrm>
+          <a:prstGeom prst="roundRect">
+            <a:avLst>
+              <a:gd name="adj" fmla="val 11429"/>
+            </a:avLst>
+          </a:prstGeom>
+          <a:solidFill>
+            <a:srgbClr val="FFFFFF"/>
+          </a:solidFill>
+          <a:ln/>
+        </p:spPr>
+      </p:sp>
+      <p:pic>
+        <p:nvPicPr>
+          <p:cNvPr id="25" name="Image 1" descr="preencoded.png">    </p:cNvPr>
+          <p:cNvPicPr>
+            <a:picLocks noChangeAspect="1"/>
+          </p:cNvPicPr>
+          <p:nvPr/>
+        </p:nvPicPr>
+        <p:blipFill>
+          <a:blip r:embed="rId2"/>
+          <a:stretch>
+            <a:fillRect/>
+          </a:stretch>
+        </p:blipFill>
+        <p:spPr>
+          <a:xfrm>
+            <a:off x="411480" y="5943600"/>
+            <a:ext cx="685800" cy="685800"/>
+          </a:xfrm>
+          <a:prstGeom prst="rect">
+            <a:avLst/>
+          </a:prstGeom>
+        </p:spPr>
+      </p:pic>
+      <p:sp>
+        <p:nvSpPr>
+          <p:cNvPr id="26" name="Text 22"/>
+          <p:cNvSpPr/>
+          <p:nvPr/>
+        </p:nvSpPr>
+        <p:spPr>
+          <a:xfrm>
+            <a:off x="1234440" y="5989320"/>
+            <a:ext cx="3657600" cy="274320"/>
+          </a:xfrm>
+          <a:prstGeom prst="rect">
+            <a:avLst/>
+          </a:prstGeom>
+          <a:noFill/>
+          <a:ln/>
+        </p:spPr>
+        <p:txBody>
+          <a:bodyPr wrap="square" rtlCol="0" anchor="ctr"/>
+          <a:lstStyle/>
+          <a:p>
+            <a:pPr indent="0" marL="0">
+              <a:buNone/>
+            </a:pPr>
+            <a:r>
+              <a:rPr lang="en-US" sz="1500" b="1" dirty="0">
+                <a:solidFill>
+                  <a:srgbClr val="2A1410"/>
+                </a:solidFill>
+                <a:latin typeface="Georgia" pitchFamily="34" charset="0"/>
+                <a:ea typeface="Georgia" pitchFamily="34" charset="-122"/>
+                <a:cs typeface="Georgia" pitchFamily="34" charset="-120"/>
+              </a:rPr>
+              <a:t>Get the app — scan with your phone</a:t>
+            </a:r>
+            <a:endParaRPr lang="en-US" sz="1500" dirty="0"/>
+          </a:p>
+        </p:txBody>
+      </p:sp>
+      <p:sp>
+        <p:nvSpPr>
+          <p:cNvPr id="27" name="Text 23"/>
+          <p:cNvSpPr/>
+          <p:nvPr/>
+        </p:nvSpPr>
+        <p:spPr>
+          <a:xfrm>
+            <a:off x="1234440" y="6309360"/>
+            <a:ext cx="3657600" cy="274320"/>
+          </a:xfrm>
+          <a:prstGeom prst="rect">
+            <a:avLst/>
+          </a:prstGeom>
+          <a:noFill/>
+          <a:ln/>
+        </p:spPr>
+        <p:txBody>
+          <a:bodyPr wrap="square" rtlCol="0" anchor="ctr"/>
+          <a:lstStyle/>
+          <a:p>
+            <a:pPr indent="0" marL="0">
+              <a:buNone/>
+            </a:pPr>
+            <a:r>
+              <a:rPr lang="en-US" sz="1200" dirty="0">
+                <a:solidFill>
+                  <a:srgbClr val="4A3530"/>
+                </a:solidFill>
+                <a:latin typeface="Calibri" pitchFamily="34" charset="0"/>
+                <a:ea typeface="Calibri" pitchFamily="34" charset="-122"/>
+                <a:cs typeface="Calibri" pitchFamily="34" charset="-120"/>
+              </a:rPr>
+              <a:t>Google Play · Android   ·   storeyinfra.com</a:t>
+            </a:r>
+            <a:endParaRPr lang="en-US" sz="1200" dirty="0"/>
+          </a:p>
+        </p:txBody>
+      </p:sp>
+      <p:sp>
+        <p:nvSpPr>
+          <p:cNvPr id="28" name="Shape 24"/>
+          <p:cNvSpPr/>
+          <p:nvPr/>
+        </p:nvSpPr>
+        <p:spPr>
+          <a:xfrm>
+            <a:off x="0" y="6858000"/>
+            <a:ext cx="5330952" cy="704088"/>
+          </a:xfrm>
+          <a:prstGeom prst="rect">
+            <a:avLst/>
+          </a:prstGeom>
+          <a:solidFill>
+            <a:srgbClr val="9A3F33"/>
+          </a:solidFill>
+          <a:ln/>
+        </p:spPr>
+      </p:sp>
+      <p:sp>
+        <p:nvSpPr>
+          <p:cNvPr id="29" name="Text 25"/>
+          <p:cNvSpPr/>
+          <p:nvPr/>
+        </p:nvSpPr>
+        <p:spPr>
+          <a:xfrm>
+            <a:off x="274320" y="6903720"/>
+            <a:ext cx="4782312" cy="274320"/>
+          </a:xfrm>
+          <a:prstGeom prst="rect">
+            <a:avLst/>
+          </a:prstGeom>
+          <a:noFill/>
+          <a:ln/>
+        </p:spPr>
+        <p:txBody>
+          <a:bodyPr wrap="square" rtlCol="0" anchor="ctr"/>
+          <a:lstStyle/>
+          <a:p>
+            <a:pPr indent="0" marL="0">
+              <a:buNone/>
+            </a:pPr>
+            <a:r>
+              <a:rPr lang="en-US" sz="1300" b="1" dirty="0">
+                <a:solidFill>
+                  <a:srgbClr val="FFFFFF"/>
+                </a:solidFill>
+                <a:latin typeface="Calibri" pitchFamily="34" charset="0"/>
+                <a:ea typeface="Calibri" pitchFamily="34" charset="-122"/>
+                <a:cs typeface="Calibri" pitchFamily="34" charset="-120"/>
+              </a:rPr>
               <a:t>Talk to the founder — Karun · WhatsApp +91 98640 66898</a:t>
             </a:r>
             <a:endParaRPr lang="en-US" sz="1300" dirty="0"/>
@@ -1842,7 +1866,7 @@
       </p:sp>
       <p:sp>
         <p:nvSpPr>
-          <p:cNvPr id="29" name="Text 26"/>
+          <p:cNvPr id="30" name="Text 26"/>
           <p:cNvSpPr/>
           <p:nvPr/>
         </p:nvSpPr>
